--- a/Slides/Semana 13/semana_13_slides.pptx
+++ b/Slides/Semana 13/semana_13_slides.pptx
@@ -1045,7 +1045,7 @@
           <a:p>
             <a:r>
               <a:rPr lang="en-US" dirty="0"/>
-              <a:t>Notas: Amarrar a mini aula antes da demonstração. Cada item retorna na demonstração ao vivo (atlas de 3 assets no Blender) e no estúdio (planejar e remapear o próprio kit). Lembrar: crítica 🔵 informal nesta semana — o atlas e a justificativa de agrupamento produzidos hoje serão evidência de C7 (Otimização) na CF5 da Semana 14 (Trim Sheets), quando Otimização entra em nota formal pela primeira vez.</a:t>
+              <a:t>Notas: Amarrar a mini aula antes da demonstração. Cada item retorna na demonstração ao vivo (atlas de 3 assets no Blender) e no estúdio (planejar e remapear o próprio kit). Lembrar: crítica 🔵 informal nesta semana — o atlas e a justificativa de agrupamento produzidos hoje serão evidência de C7 (Otimização) na CF4 da Semana 14 (Trim Sheets), quando Otimização entra em nota formal pela primeira vez.</a:t>
             </a:r>
             <a:endParaRPr lang="en-US" dirty="0"/>
           </a:p>
